--- a/meetings/9-june/presentation/progress-deck.pptx
+++ b/meetings/9-june/presentation/progress-deck.pptx
@@ -3223,45 +3223,6 @@
                 <a:latin typeface="Calibri"/>
               </a:rPr>
               <a:t>June 16, 2026</a:t>
-            </a:r>
-          </a:p>
-        </p:txBody>
-      </p:sp>
-      <p:sp>
-        <p:nvSpPr>
-          <p:cNvPr id="4" name="TextBox 3"/>
-          <p:cNvSpPr txBox="1"/>
-          <p:nvPr/>
-        </p:nvSpPr>
-        <p:spPr>
-          <a:xfrm>
-            <a:off x="822960" y="6355080"/>
-            <a:ext cx="10515600" cy="365760"/>
-          </a:xfrm>
-          <a:prstGeom prst="rect">
-            <a:avLst/>
-          </a:prstGeom>
-          <a:noFill/>
-        </p:spPr>
-        <p:txBody>
-          <a:bodyPr wrap="square">
-            <a:spAutoFit/>
-          </a:bodyPr>
-          <a:lstStyle/>
-          <a:p>
-            <a:pPr>
-              <a:spcAft>
-                <a:spcPts val="800"/>
-              </a:spcAft>
-            </a:pPr>
-            <a:r>
-              <a:rPr sz="1100" b="0">
-                <a:solidFill>
-                  <a:srgbClr val="B2B2BE"/>
-                </a:solidFill>
-                <a:latin typeface="Calibri"/>
-              </a:rPr>
-              <a:t>Figures and code produced with AI assistance, disclosed per course policy.</a:t>
             </a:r>
           </a:p>
         </p:txBody>
